--- a/exports/pptx/lessons/primary-module-02-panchabhuta/day-07-imbalance.pptx
+++ b/exports/pptx/lessons/primary-module-02-panchabhuta/day-07-imbalance.pptx
@@ -16,9 +16,10 @@
     <p:sldId id="264" r:id="rId10"/>
     <p:sldId id="265" r:id="rId11"/>
     <p:sldId id="266" r:id="rId12"/>
+    <p:sldId id="267" r:id="rId13"/>
   </p:sldIdLst>
   <p:notesMasterIdLst>
-    <p:notesMasterId r:id="rId13"/>
+    <p:notesMasterId r:id="rId14"/>
   </p:notesMasterIdLst>
   <p:sldSz cx="9144000" cy="5143500"/>
   <p:notesSz cx="5143500" cy="9144000"/>
@@ -712,6 +713,94 @@
             <a:fld id="{F7021451-1387-4CA6-816F-3879F97B5CBC}" type="slidenum">
               <a:rPr lang="en-US"/>
               <a:t>11</a:t>
+            </a:fld>
+            <a:endParaRPr lang="en-US"/>
+          </a:p>
+        </p:txBody>
+      </p:sp>
+    </p:spTree>
+    <p:extLst>
+      <p:ext uri="{BB962C8B-B14F-4D97-AF65-F5344CB8AC3E}">
+        <p14:creationId xmlns:p14="http://schemas.microsoft.com/office/powerpoint/2010/main" val="1024086991"/>
+      </p:ext>
+    </p:extLst>
+  </p:cSld>
+  <p:clrMapOvr>
+    <a:masterClrMapping/>
+  </p:clrMapOvr>
+</p:notes>
+</file>
+
+<file path=ppt/notesSlides/notesSlide12.xml><?xml version="1.0" encoding="utf-8"?>
+<p:notes xmlns:a="http://schemas.openxmlformats.org/drawingml/2006/main" xmlns:r="http://schemas.openxmlformats.org/officeDocument/2006/relationships" xmlns:p="http://schemas.openxmlformats.org/presentationml/2006/main">
+  <p:cSld>
+    <p:spTree>
+      <p:nvGrpSpPr>
+        <p:cNvPr id="1" name=""/>
+        <p:cNvGrpSpPr/>
+        <p:nvPr/>
+      </p:nvGrpSpPr>
+      <p:grpSpPr>
+        <a:xfrm>
+          <a:off x="0" y="0"/>
+          <a:ext cx="0" cy="0"/>
+          <a:chOff x="0" y="0"/>
+          <a:chExt cx="0" cy="0"/>
+        </a:xfrm>
+      </p:grpSpPr>
+      <p:sp>
+        <p:nvSpPr>
+          <p:cNvPr id="2" name="Slide Image Placeholder 1"/>
+          <p:cNvSpPr>
+            <a:spLocks noGrp="1" noRot="1" noChangeAspect="1"/>
+          </p:cNvSpPr>
+          <p:nvPr>
+            <p:ph type="sldImg"/>
+          </p:nvPr>
+        </p:nvSpPr>
+        <p:spPr/>
+      </p:sp>
+      <p:sp>
+        <p:nvSpPr>
+          <p:cNvPr id="3" name="Notes Placeholder 2"/>
+          <p:cNvSpPr>
+            <a:spLocks noGrp="1"/>
+          </p:cNvSpPr>
+          <p:nvPr>
+            <p:ph type="body" idx="1"/>
+          </p:nvPr>
+        </p:nvSpPr>
+        <p:spPr/>
+        <p:txBody>
+          <a:bodyPr/>
+          <a:lstStyle/>
+          <a:p>
+            <a:r>
+              <a:rPr lang="en-US" dirty="0"/>
+              <a:t/>
+            </a:r>
+            <a:endParaRPr lang="en-US" dirty="0"/>
+          </a:p>
+        </p:txBody>
+      </p:sp>
+      <p:sp>
+        <p:nvSpPr>
+          <p:cNvPr id="4" name="Slide Number Placeholder 3"/>
+          <p:cNvSpPr>
+            <a:spLocks noGrp="1"/>
+          </p:cNvSpPr>
+          <p:nvPr>
+            <p:ph type="sldNum" sz="quarter" idx="10"/>
+          </p:nvPr>
+        </p:nvSpPr>
+        <p:spPr/>
+        <p:txBody>
+          <a:bodyPr/>
+          <a:lstStyle/>
+          <a:p>
+            <a:fld id="{F7021451-1387-4CA6-816F-3879F97B5CBC}" type="slidenum">
+              <a:rPr lang="en-US"/>
+              <a:t>12</a:t>
             </a:fld>
             <a:endParaRPr lang="en-US"/>
           </a:p>
@@ -1965,102 +2054,6 @@
         </p:nvSpPr>
         <p:spPr>
           <a:xfrm>
-            <a:off x="406301" y="1223963"/>
-            <a:ext cx="8498026" cy="274290"/>
-          </a:xfrm>
-          <a:prstGeom prst="rect">
-            <a:avLst/>
-          </a:prstGeom>
-          <a:noFill/>
-          <a:ln/>
-        </p:spPr>
-        <p:txBody>
-          <a:bodyPr wrap="square" lIns="0" tIns="0" rIns="0" bIns="0" rtlCol="0" anchor="t"/>
-          <a:lstStyle/>
-          <a:p>
-            <a:pPr algn="l" indent="0" marL="0">
-              <a:lnSpc>
-                <a:spcPts val="2160"/>
-              </a:lnSpc>
-              <a:spcBef>
-                <a:spcPts val="600"/>
-              </a:spcBef>
-              <a:spcAft>
-                <a:spcPts val="800"/>
-              </a:spcAft>
-              <a:buNone/>
-            </a:pPr>
-            <a:r>
-              <a:rPr lang="en-US" sz="1800" b="1" dirty="0">
-                <a:solidFill>
-                  <a:srgbClr val="E07A5F"/>
-                </a:solidFill>
-                <a:latin typeface="Georgia" pitchFamily="34" charset="0"/>
-                <a:ea typeface="Georgia" pitchFamily="34" charset="-122"/>
-                <a:cs typeface="Georgia" pitchFamily="34" charset="-120"/>
-              </a:rPr>
-              <a:t>Goal</a:t>
-            </a:r>
-            <a:endParaRPr lang="en-US" sz="1800" dirty="0"/>
-          </a:p>
-        </p:txBody>
-      </p:sp>
-      <p:sp>
-        <p:nvSpPr>
-          <p:cNvPr id="6" name="Text 4"/>
-          <p:cNvSpPr/>
-          <p:nvPr/>
-        </p:nvSpPr>
-        <p:spPr>
-          <a:xfrm>
-            <a:off x="406301" y="1637854"/>
-            <a:ext cx="8498026" cy="426541"/>
-          </a:xfrm>
-          <a:prstGeom prst="rect">
-            <a:avLst/>
-          </a:prstGeom>
-          <a:noFill/>
-          <a:ln/>
-        </p:spPr>
-        <p:txBody>
-          <a:bodyPr wrap="square" lIns="0" tIns="0" rIns="0" bIns="0" rtlCol="0" anchor="t"/>
-          <a:lstStyle/>
-          <a:p>
-            <a:pPr algn="l" indent="0" marL="0">
-              <a:lnSpc>
-                <a:spcPts val="1680"/>
-              </a:lnSpc>
-              <a:spcBef>
-                <a:spcPts val="300"/>
-              </a:spcBef>
-              <a:spcAft>
-                <a:spcPts val="300"/>
-              </a:spcAft>
-              <a:buNone/>
-            </a:pPr>
-            <a:r>
-              <a:rPr lang="en-US" sz="1200" dirty="0">
-                <a:solidFill>
-                  <a:srgbClr val="2C2C2C"/>
-                </a:solidFill>
-                <a:latin typeface="Verdana" pitchFamily="34" charset="0"/>
-                <a:ea typeface="Verdana" pitchFamily="34" charset="-122"/>
-                <a:cs typeface="Verdana" pitchFamily="34" charset="-120"/>
-              </a:rPr>
-              <a:t>Children walk around the school grounds and find one place where an element is "too much" or "missing." They draw and tell the class about it.</a:t>
-            </a:r>
-            <a:endParaRPr lang="en-US" sz="1200" dirty="0"/>
-          </a:p>
-        </p:txBody>
-      </p:sp>
-      <p:sp>
-        <p:nvSpPr>
-          <p:cNvPr id="7" name="Text 5"/>
-          <p:cNvSpPr/>
-          <p:nvPr/>
-        </p:nvSpPr>
-        <p:spPr>
-          <a:xfrm>
             <a:off x="406301" y="4434929"/>
             <a:ext cx="8498026" cy="213271"/>
           </a:xfrm>
@@ -2205,7 +2198,7 @@
                 <a:ea typeface="Georgia" pitchFamily="34" charset="-122"/>
                 <a:cs typeface="Georgia" pitchFamily="34" charset="-120"/>
               </a:rPr>
-              <a:t>Differentiation</a:t>
+              <a:t>Homework</a:t>
             </a:r>
             <a:endParaRPr lang="en-US" sz="1800" dirty="0"/>
           </a:p>
@@ -2220,7 +2213,7 @@
         <p:spPr>
           <a:xfrm>
             <a:off x="634901" y="883593"/>
-            <a:ext cx="8102798" cy="937022"/>
+            <a:ext cx="8102798" cy="281880"/>
           </a:xfrm>
           <a:prstGeom prst="rect">
             <a:avLst/>
@@ -2243,7 +2236,7 @@
               <a:buChar char="•"/>
             </a:pPr>
             <a:r>
-              <a:rPr lang="en-US" sz="1200" b="1" dirty="0">
+              <a:rPr lang="en-US" sz="1200" dirty="0">
                 <a:solidFill>
                   <a:srgbClr val="2C2C2C"/>
                 </a:solidFill>
@@ -2251,71 +2244,7 @@
                 <a:ea typeface="Verdana" pitchFamily="34" charset="-122"/>
                 <a:cs typeface="Verdana" pitchFamily="34" charset="-120"/>
               </a:rPr>
-              <a:t>Tier up:</a:t>
-            </a:r>
-            <a:pPr algn="l" indent="0" marL="0">
-              <a:lnSpc>
-                <a:spcPts val="1620"/>
-              </a:lnSpc>
-              <a:spcAft>
-                <a:spcPts val="300"/>
-              </a:spcAft>
-              <a:buNone/>
-            </a:pPr>
-            <a:r>
-              <a:rPr lang="en-US" sz="1200" dirty="0">
-                <a:solidFill>
-                  <a:srgbClr val="2C2C2C"/>
-                </a:solidFill>
-                <a:latin typeface="Verdana" pitchFamily="34" charset="0"/>
-                <a:ea typeface="Verdana" pitchFamily="34" charset="-122"/>
-                <a:cs typeface="Verdana" pitchFamily="34" charset="-120"/>
-              </a:rPr>
-              <a:t> Think of ONE small thing your class could do to help (pick up a piece of trash, plant a seed, save water at the tap).</a:t>
-            </a:r>
-            <a:endParaRPr lang="en-US" sz="1200" dirty="0"/>
-          </a:p>
-          <a:p>
-            <a:pPr algn="l" marL="342900" indent="-342900">
-              <a:lnSpc>
-                <a:spcPts val="1620"/>
-              </a:lnSpc>
-              <a:spcAft>
-                <a:spcPts val="300"/>
-              </a:spcAft>
-              <a:buSzPct val="100000"/>
-              <a:buChar char="•"/>
-            </a:pPr>
-            <a:r>
-              <a:rPr lang="en-US" sz="1200" b="1" dirty="0">
-                <a:solidFill>
-                  <a:srgbClr val="2C2C2C"/>
-                </a:solidFill>
-                <a:latin typeface="Verdana" pitchFamily="34" charset="0"/>
-                <a:ea typeface="Verdana" pitchFamily="34" charset="-122"/>
-                <a:cs typeface="Verdana" pitchFamily="34" charset="-120"/>
-              </a:rPr>
-              <a:t>Tier down:</a:t>
-            </a:r>
-            <a:pPr algn="l" indent="0" marL="0">
-              <a:lnSpc>
-                <a:spcPts val="1620"/>
-              </a:lnSpc>
-              <a:spcAft>
-                <a:spcPts val="300"/>
-              </a:spcAft>
-              <a:buNone/>
-            </a:pPr>
-            <a:r>
-              <a:rPr lang="en-US" sz="1200" dirty="0">
-                <a:solidFill>
-                  <a:srgbClr val="2C2C2C"/>
-                </a:solidFill>
-                <a:latin typeface="Verdana" pitchFamily="34" charset="0"/>
-                <a:ea typeface="Verdana" pitchFamily="34" charset="-122"/>
-                <a:cs typeface="Verdana" pitchFamily="34" charset="-120"/>
-              </a:rPr>
-              <a:t> Pick any element. The "imbalance" can be simply "I saw a lot of ____ today" without judgement.</a:t>
+              <a:t>Tomorrow we start projects. Think: which ONE element do you want to work on?</a:t>
             </a:r>
             <a:endParaRPr lang="en-US" sz="1200" dirty="0"/>
           </a:p>
@@ -2473,7 +2402,7 @@
                 <a:ea typeface="Georgia" pitchFamily="34" charset="-122"/>
                 <a:cs typeface="Georgia" pitchFamily="34" charset="-120"/>
               </a:rPr>
-              <a:t>Teacher's quick notes</a:t>
+              <a:t>Differentiation</a:t>
             </a:r>
             <a:endParaRPr lang="en-US" sz="1800" dirty="0"/>
           </a:p>
@@ -2487,8 +2416,8 @@
         </p:nvSpPr>
         <p:spPr>
           <a:xfrm>
-            <a:off x="406301" y="870942"/>
-            <a:ext cx="8498026" cy="639812"/>
+            <a:off x="634901" y="883593"/>
+            <a:ext cx="8102798" cy="937022"/>
           </a:xfrm>
           <a:prstGeom prst="rect">
             <a:avLst/>
@@ -2500,20 +2429,18 @@
           <a:bodyPr wrap="square" lIns="0" tIns="0" rIns="0" bIns="0" rtlCol="0" anchor="t"/>
           <a:lstStyle/>
           <a:p>
-            <a:pPr algn="l" indent="0" marL="0">
-              <a:lnSpc>
-                <a:spcPts val="1680"/>
-              </a:lnSpc>
-              <a:spcBef>
-                <a:spcPts val="300"/>
-              </a:spcBef>
-              <a:spcAft>
-                <a:spcPts val="300"/>
-              </a:spcAft>
-              <a:buNone/>
-            </a:pPr>
-            <a:r>
-              <a:rPr lang="en-US" sz="1200" dirty="0">
+            <a:pPr algn="l" marL="342900" indent="-342900">
+              <a:lnSpc>
+                <a:spcPts val="1620"/>
+              </a:lnSpc>
+              <a:spcAft>
+                <a:spcPts val="300"/>
+              </a:spcAft>
+              <a:buSzPct val="100000"/>
+              <a:buChar char="•"/>
+            </a:pPr>
+            <a:r>
+              <a:rPr lang="en-US" sz="1200" b="1" dirty="0">
                 <a:solidFill>
                   <a:srgbClr val="2C2C2C"/>
                 </a:solidFill>
@@ -2521,7 +2448,299 @@
                 <a:ea typeface="Verdana" pitchFamily="34" charset="-122"/>
                 <a:cs typeface="Verdana" pitchFamily="34" charset="-120"/>
               </a:rPr>
-              <a:t>– Don't let this become depressing. Every child should also notice ONE place where the elements are in good balance (a healthy tree, clean water, a quiet corner). – For schools in a tough environment, focus the walk on the school grounds and ONE specific issue (e.g. litter). Don't try to cover everything.</a:t>
+              <a:t>Tier up:</a:t>
+            </a:r>
+            <a:pPr algn="l" indent="0" marL="0">
+              <a:lnSpc>
+                <a:spcPts val="1620"/>
+              </a:lnSpc>
+              <a:spcAft>
+                <a:spcPts val="300"/>
+              </a:spcAft>
+              <a:buNone/>
+            </a:pPr>
+            <a:r>
+              <a:rPr lang="en-US" sz="1200" dirty="0">
+                <a:solidFill>
+                  <a:srgbClr val="2C2C2C"/>
+                </a:solidFill>
+                <a:latin typeface="Verdana" pitchFamily="34" charset="0"/>
+                <a:ea typeface="Verdana" pitchFamily="34" charset="-122"/>
+                <a:cs typeface="Verdana" pitchFamily="34" charset="-120"/>
+              </a:rPr>
+              <a:t> Think of ONE small thing your class could do to help (pick up a piece of trash, plant a seed, save water at the tap).</a:t>
+            </a:r>
+            <a:endParaRPr lang="en-US" sz="1200" dirty="0"/>
+          </a:p>
+          <a:p>
+            <a:pPr algn="l" marL="342900" indent="-342900">
+              <a:lnSpc>
+                <a:spcPts val="1620"/>
+              </a:lnSpc>
+              <a:spcAft>
+                <a:spcPts val="300"/>
+              </a:spcAft>
+              <a:buSzPct val="100000"/>
+              <a:buChar char="•"/>
+            </a:pPr>
+            <a:r>
+              <a:rPr lang="en-US" sz="1200" b="1" dirty="0">
+                <a:solidFill>
+                  <a:srgbClr val="2C2C2C"/>
+                </a:solidFill>
+                <a:latin typeface="Verdana" pitchFamily="34" charset="0"/>
+                <a:ea typeface="Verdana" pitchFamily="34" charset="-122"/>
+                <a:cs typeface="Verdana" pitchFamily="34" charset="-120"/>
+              </a:rPr>
+              <a:t>Tier down:</a:t>
+            </a:r>
+            <a:pPr algn="l" indent="0" marL="0">
+              <a:lnSpc>
+                <a:spcPts val="1620"/>
+              </a:lnSpc>
+              <a:spcAft>
+                <a:spcPts val="300"/>
+              </a:spcAft>
+              <a:buNone/>
+            </a:pPr>
+            <a:r>
+              <a:rPr lang="en-US" sz="1200" dirty="0">
+                <a:solidFill>
+                  <a:srgbClr val="2C2C2C"/>
+                </a:solidFill>
+                <a:latin typeface="Verdana" pitchFamily="34" charset="0"/>
+                <a:ea typeface="Verdana" pitchFamily="34" charset="-122"/>
+                <a:cs typeface="Verdana" pitchFamily="34" charset="-120"/>
+              </a:rPr>
+              <a:t> Pick any element. The "imbalance" can be simply "I saw a lot of ____ today" without judgement.</a:t>
+            </a:r>
+            <a:endParaRPr lang="en-US" sz="1200" dirty="0"/>
+          </a:p>
+        </p:txBody>
+      </p:sp>
+      <p:sp>
+        <p:nvSpPr>
+          <p:cNvPr id="5" name="Text 3"/>
+          <p:cNvSpPr/>
+          <p:nvPr/>
+        </p:nvSpPr>
+        <p:spPr>
+          <a:xfrm>
+            <a:off x="406301" y="4434929"/>
+            <a:ext cx="8498026" cy="213271"/>
+          </a:xfrm>
+          <a:prstGeom prst="rect">
+            <a:avLst/>
+          </a:prstGeom>
+          <a:noFill/>
+          <a:ln/>
+        </p:spPr>
+        <p:txBody>
+          <a:bodyPr wrap="square" lIns="0" tIns="0" rIns="0" bIns="0" rtlCol="0" anchor="t"/>
+          <a:lstStyle/>
+          <a:p>
+            <a:pPr algn="l" indent="0" marL="0">
+              <a:lnSpc>
+                <a:spcPts val="1680"/>
+              </a:lnSpc>
+              <a:spcBef>
+                <a:spcPts val="300"/>
+              </a:spcBef>
+              <a:spcAft>
+                <a:spcPts val="300"/>
+              </a:spcAft>
+              <a:buNone/>
+            </a:pPr>
+            <a:r>
+              <a:rPr lang="en-US" sz="1200" dirty="0">
+                <a:solidFill>
+                  <a:srgbClr val="2C2C2C"/>
+                </a:solidFill>
+                <a:latin typeface="Verdana" pitchFamily="34" charset="0"/>
+                <a:ea typeface="Verdana" pitchFamily="34" charset="-122"/>
+                <a:cs typeface="Verdana" pitchFamily="34" charset="-120"/>
+              </a:rPr>
+              <a:t>Primary ·  · IKS Curriculum</a:t>
+            </a:r>
+            <a:endParaRPr lang="en-US" sz="1200" dirty="0"/>
+          </a:p>
+        </p:txBody>
+      </p:sp>
+    </p:spTree>
+  </p:cSld>
+  <p:clrMapOvr>
+    <a:masterClrMapping/>
+  </p:clrMapOvr>
+</p:sld>
+</file>
+
+<file path=ppt/slides/slide12.xml><?xml version="1.0" encoding="utf-8"?>
+<p:sld xmlns:a="http://schemas.openxmlformats.org/drawingml/2006/main" xmlns:r="http://schemas.openxmlformats.org/officeDocument/2006/relationships" xmlns:p="http://schemas.openxmlformats.org/presentationml/2006/main">
+  <p:cSld name="Slide 12">
+    <p:bg>
+      <p:bgPr>
+        <a:solidFill>
+          <a:srgbClr val="FAF7F2"/>
+        </a:solidFill>
+      </p:bgPr>
+    </p:bg>
+    <p:spTree>
+      <p:nvGrpSpPr>
+        <p:cNvPr id="1" name=""/>
+        <p:cNvGrpSpPr/>
+        <p:nvPr/>
+      </p:nvGrpSpPr>
+      <p:grpSpPr>
+        <a:xfrm>
+          <a:off x="0" y="0"/>
+          <a:ext cx="0" cy="0"/>
+          <a:chOff x="0" y="0"/>
+          <a:chExt cx="0" cy="0"/>
+        </a:xfrm>
+      </p:grpSpPr>
+      <p:sp>
+        <p:nvSpPr>
+          <p:cNvPr id="2" name="Text 0"/>
+          <p:cNvSpPr/>
+          <p:nvPr/>
+        </p:nvSpPr>
+        <p:spPr>
+          <a:xfrm>
+            <a:off x="0" y="0"/>
+            <a:ext cx="9144000" cy="101501"/>
+          </a:xfrm>
+          <a:prstGeom prst="rect">
+            <a:avLst/>
+          </a:prstGeom>
+          <a:solidFill>
+            <a:srgbClr val="87A96B"/>
+          </a:solidFill>
+          <a:ln/>
+        </p:spPr>
+        <p:txBody>
+          <a:bodyPr wrap="square" rtlCol="0" anchor="ctr"/>
+          <a:lstStyle/>
+          <a:p>
+            <a:pPr indent="0" marL="0">
+              <a:buNone/>
+            </a:pPr>
+            <a:endParaRPr lang="en-US" dirty="0"/>
+          </a:p>
+        </p:txBody>
+      </p:sp>
+      <p:sp>
+        <p:nvSpPr>
+          <p:cNvPr id="3" name="Text 1"/>
+          <p:cNvSpPr/>
+          <p:nvPr/>
+        </p:nvSpPr>
+        <p:spPr>
+          <a:xfrm>
+            <a:off x="406301" y="457051"/>
+            <a:ext cx="8498026" cy="274290"/>
+          </a:xfrm>
+          <a:prstGeom prst="rect">
+            <a:avLst/>
+          </a:prstGeom>
+          <a:noFill/>
+          <a:ln/>
+        </p:spPr>
+        <p:txBody>
+          <a:bodyPr wrap="square" lIns="0" tIns="0" rIns="0" bIns="0" rtlCol="0" anchor="t"/>
+          <a:lstStyle/>
+          <a:p>
+            <a:pPr algn="l" indent="0" marL="0">
+              <a:lnSpc>
+                <a:spcPts val="2160"/>
+              </a:lnSpc>
+              <a:spcBef>
+                <a:spcPts val="600"/>
+              </a:spcBef>
+              <a:spcAft>
+                <a:spcPts val="800"/>
+              </a:spcAft>
+              <a:buNone/>
+            </a:pPr>
+            <a:r>
+              <a:rPr lang="en-US" sz="1800" b="1" dirty="0">
+                <a:solidFill>
+                  <a:srgbClr val="E07A5F"/>
+                </a:solidFill>
+                <a:latin typeface="Georgia" pitchFamily="34" charset="0"/>
+                <a:ea typeface="Georgia" pitchFamily="34" charset="-122"/>
+                <a:cs typeface="Georgia" pitchFamily="34" charset="-120"/>
+              </a:rPr>
+              <a:t>Teacher's quick notes</a:t>
+            </a:r>
+            <a:endParaRPr lang="en-US" sz="1800" dirty="0"/>
+          </a:p>
+        </p:txBody>
+      </p:sp>
+      <p:sp>
+        <p:nvSpPr>
+          <p:cNvPr id="4" name="Text 2"/>
+          <p:cNvSpPr/>
+          <p:nvPr/>
+        </p:nvSpPr>
+        <p:spPr>
+          <a:xfrm>
+            <a:off x="634901" y="883593"/>
+            <a:ext cx="8102798" cy="937022"/>
+          </a:xfrm>
+          <a:prstGeom prst="rect">
+            <a:avLst/>
+          </a:prstGeom>
+          <a:noFill/>
+          <a:ln/>
+        </p:spPr>
+        <p:txBody>
+          <a:bodyPr wrap="square" lIns="0" tIns="0" rIns="0" bIns="0" rtlCol="0" anchor="t"/>
+          <a:lstStyle/>
+          <a:p>
+            <a:pPr algn="l" marL="342900" indent="-342900">
+              <a:lnSpc>
+                <a:spcPts val="1620"/>
+              </a:lnSpc>
+              <a:spcAft>
+                <a:spcPts val="300"/>
+              </a:spcAft>
+              <a:buSzPct val="100000"/>
+              <a:buChar char="•"/>
+            </a:pPr>
+            <a:r>
+              <a:rPr lang="en-US" sz="1200" dirty="0">
+                <a:solidFill>
+                  <a:srgbClr val="2C2C2C"/>
+                </a:solidFill>
+                <a:latin typeface="Verdana" pitchFamily="34" charset="0"/>
+                <a:ea typeface="Verdana" pitchFamily="34" charset="-122"/>
+                <a:cs typeface="Verdana" pitchFamily="34" charset="-120"/>
+              </a:rPr>
+              <a:t>Don't let this become depressing. Every child should also notice ONE place where the elements are in good balance (a healthy tree, clean water, a quiet corner).</a:t>
+            </a:r>
+            <a:endParaRPr lang="en-US" sz="1200" dirty="0"/>
+          </a:p>
+          <a:p>
+            <a:pPr algn="l" marL="342900" indent="-342900">
+              <a:lnSpc>
+                <a:spcPts val="1620"/>
+              </a:lnSpc>
+              <a:spcAft>
+                <a:spcPts val="300"/>
+              </a:spcAft>
+              <a:buSzPct val="100000"/>
+              <a:buChar char="•"/>
+            </a:pPr>
+            <a:r>
+              <a:rPr lang="en-US" sz="1200" dirty="0">
+                <a:solidFill>
+                  <a:srgbClr val="2C2C2C"/>
+                </a:solidFill>
+                <a:latin typeface="Verdana" pitchFamily="34" charset="0"/>
+                <a:ea typeface="Verdana" pitchFamily="34" charset="-122"/>
+                <a:cs typeface="Verdana" pitchFamily="34" charset="-120"/>
+              </a:rPr>
+              <a:t>For schools in a tough environment, focus the walk on the school grounds and ONE specific issue (e.g. litter). Don't try to cover everything.</a:t>
             </a:r>
             <a:endParaRPr lang="en-US" sz="1200" dirty="0"/>
           </a:p>
@@ -2679,7 +2898,7 @@
                 <a:ea typeface="Georgia" pitchFamily="34" charset="-122"/>
                 <a:cs typeface="Georgia" pitchFamily="34" charset="-120"/>
               </a:rPr>
-              <a:t>Materials</a:t>
+              <a:t>Goal</a:t>
             </a:r>
             <a:endParaRPr lang="en-US" sz="1800" dirty="0"/>
           </a:p>
@@ -2694,7 +2913,7 @@
         <p:spPr>
           <a:xfrm>
             <a:off x="406301" y="870942"/>
-            <a:ext cx="8498026" cy="213271"/>
+            <a:ext cx="8498026" cy="426541"/>
           </a:xfrm>
           <a:prstGeom prst="rect">
             <a:avLst/>
@@ -2727,7 +2946,7 @@
                 <a:ea typeface="Verdana" pitchFamily="34" charset="-122"/>
                 <a:cs typeface="Verdana" pitchFamily="34" charset="-120"/>
               </a:rPr>
-              <a:t>– Drawing paper + clipboards (or hard surfaces) – Crayons – Adult supervisor accompanying the walk</a:t>
+              <a:t>Children walk around the school grounds and find one place where an element is "too much" or "missing." They draw and tell the class about it.</a:t>
             </a:r>
             <a:endParaRPr lang="en-US" sz="1200" dirty="0"/>
           </a:p>
@@ -2885,7 +3104,7 @@
                 <a:ea typeface="Georgia" pitchFamily="34" charset="-122"/>
                 <a:cs typeface="Georgia" pitchFamily="34" charset="-120"/>
               </a:rPr>
-              <a:t>The flow</a:t>
+              <a:t>Materials</a:t>
             </a:r>
             <a:endParaRPr lang="en-US" sz="1800" dirty="0"/>
           </a:p>
@@ -2894,6 +3113,100 @@
       <p:sp>
         <p:nvSpPr>
           <p:cNvPr id="4" name="Text 2"/>
+          <p:cNvSpPr/>
+          <p:nvPr/>
+        </p:nvSpPr>
+        <p:spPr>
+          <a:xfrm>
+            <a:off x="634901" y="883593"/>
+            <a:ext cx="8102798" cy="769441"/>
+          </a:xfrm>
+          <a:prstGeom prst="rect">
+            <a:avLst/>
+          </a:prstGeom>
+          <a:noFill/>
+          <a:ln/>
+        </p:spPr>
+        <p:txBody>
+          <a:bodyPr wrap="square" lIns="0" tIns="0" rIns="0" bIns="0" rtlCol="0" anchor="t"/>
+          <a:lstStyle/>
+          <a:p>
+            <a:pPr algn="l" marL="342900" indent="-342900">
+              <a:lnSpc>
+                <a:spcPts val="1620"/>
+              </a:lnSpc>
+              <a:spcAft>
+                <a:spcPts val="300"/>
+              </a:spcAft>
+              <a:buSzPct val="100000"/>
+              <a:buChar char="•"/>
+            </a:pPr>
+            <a:r>
+              <a:rPr lang="en-US" sz="1200" dirty="0">
+                <a:solidFill>
+                  <a:srgbClr val="2C2C2C"/>
+                </a:solidFill>
+                <a:latin typeface="Verdana" pitchFamily="34" charset="0"/>
+                <a:ea typeface="Verdana" pitchFamily="34" charset="-122"/>
+                <a:cs typeface="Verdana" pitchFamily="34" charset="-120"/>
+              </a:rPr>
+              <a:t>Drawing paper + clipboards (or hard surfaces)</a:t>
+            </a:r>
+            <a:endParaRPr lang="en-US" sz="1200" dirty="0"/>
+          </a:p>
+          <a:p>
+            <a:pPr algn="l" marL="342900" indent="-342900">
+              <a:lnSpc>
+                <a:spcPts val="1620"/>
+              </a:lnSpc>
+              <a:spcAft>
+                <a:spcPts val="300"/>
+              </a:spcAft>
+              <a:buSzPct val="100000"/>
+              <a:buChar char="•"/>
+            </a:pPr>
+            <a:r>
+              <a:rPr lang="en-US" sz="1200" dirty="0">
+                <a:solidFill>
+                  <a:srgbClr val="2C2C2C"/>
+                </a:solidFill>
+                <a:latin typeface="Verdana" pitchFamily="34" charset="0"/>
+                <a:ea typeface="Verdana" pitchFamily="34" charset="-122"/>
+                <a:cs typeface="Verdana" pitchFamily="34" charset="-120"/>
+              </a:rPr>
+              <a:t>Crayons</a:t>
+            </a:r>
+            <a:endParaRPr lang="en-US" sz="1200" dirty="0"/>
+          </a:p>
+          <a:p>
+            <a:pPr algn="l" marL="342900" indent="-342900">
+              <a:lnSpc>
+                <a:spcPts val="1620"/>
+              </a:lnSpc>
+              <a:spcAft>
+                <a:spcPts val="300"/>
+              </a:spcAft>
+              <a:buSzPct val="100000"/>
+              <a:buChar char="•"/>
+            </a:pPr>
+            <a:r>
+              <a:rPr lang="en-US" sz="1200" dirty="0">
+                <a:solidFill>
+                  <a:srgbClr val="2C2C2C"/>
+                </a:solidFill>
+                <a:latin typeface="Verdana" pitchFamily="34" charset="0"/>
+                <a:ea typeface="Verdana" pitchFamily="34" charset="-122"/>
+                <a:cs typeface="Verdana" pitchFamily="34" charset="-120"/>
+              </a:rPr>
+              <a:t>Adult supervisor accompanying the walk</a:t>
+            </a:r>
+            <a:endParaRPr lang="en-US" sz="1200" dirty="0"/>
+          </a:p>
+        </p:txBody>
+      </p:sp>
+      <p:sp>
+        <p:nvSpPr>
+          <p:cNvPr id="5" name="Text 3"/>
           <p:cNvSpPr/>
           <p:nvPr/>
         </p:nvSpPr>
@@ -3043,7 +3356,7 @@
                 <a:ea typeface="Georgia" pitchFamily="34" charset="-122"/>
                 <a:cs typeface="Georgia" pitchFamily="34" charset="-120"/>
               </a:rPr>
-              <a:t>Settle + chant + song (5 min)</a:t>
+              <a:t>The flow</a:t>
             </a:r>
             <a:endParaRPr lang="en-US" sz="1800" dirty="0"/>
           </a:p>
@@ -3052,54 +3365,6 @@
       <p:sp>
         <p:nvSpPr>
           <p:cNvPr id="4" name="Text 2"/>
-          <p:cNvSpPr/>
-          <p:nvPr/>
-        </p:nvSpPr>
-        <p:spPr>
-          <a:xfrm>
-            <a:off x="406301" y="870942"/>
-            <a:ext cx="8498026" cy="213271"/>
-          </a:xfrm>
-          <a:prstGeom prst="rect">
-            <a:avLst/>
-          </a:prstGeom>
-          <a:noFill/>
-          <a:ln/>
-        </p:spPr>
-        <p:txBody>
-          <a:bodyPr wrap="square" lIns="0" tIns="0" rIns="0" bIns="0" rtlCol="0" anchor="t"/>
-          <a:lstStyle/>
-          <a:p>
-            <a:pPr algn="l" indent="0" marL="0">
-              <a:lnSpc>
-                <a:spcPts val="1680"/>
-              </a:lnSpc>
-              <a:spcBef>
-                <a:spcPts val="300"/>
-              </a:spcBef>
-              <a:spcAft>
-                <a:spcPts val="300"/>
-              </a:spcAft>
-              <a:buNone/>
-            </a:pPr>
-            <a:r>
-              <a:rPr lang="en-US" sz="1200" dirty="0">
-                <a:solidFill>
-                  <a:srgbClr val="2C2C2C"/>
-                </a:solidFill>
-                <a:latin typeface="Verdana" pitchFamily="34" charset="0"/>
-                <a:ea typeface="Verdana" pitchFamily="34" charset="-122"/>
-                <a:cs typeface="Verdana" pitchFamily="34" charset="-120"/>
-              </a:rPr>
-              <a:t>Daily chant + song.</a:t>
-            </a:r>
-            <a:endParaRPr lang="en-US" sz="1200" dirty="0"/>
-          </a:p>
-        </p:txBody>
-      </p:sp>
-      <p:sp>
-        <p:nvSpPr>
-          <p:cNvPr id="5" name="Text 3"/>
           <p:cNvSpPr/>
           <p:nvPr/>
         </p:nvSpPr>
@@ -3249,7 +3514,7 @@
                 <a:ea typeface="Georgia" pitchFamily="34" charset="-122"/>
                 <a:cs typeface="Georgia" pitchFamily="34" charset="-120"/>
               </a:rPr>
-              <a:t>Story — what is imbalance? (5 min)</a:t>
+              <a:t>Settle + chant + song (5 min)</a:t>
             </a:r>
             <a:endParaRPr lang="en-US" sz="1800" dirty="0"/>
           </a:p>
@@ -3263,8 +3528,8 @@
         </p:nvSpPr>
         <p:spPr>
           <a:xfrm>
-            <a:off x="634901" y="883593"/>
-            <a:ext cx="8102798" cy="487561"/>
+            <a:off x="406301" y="870942"/>
+            <a:ext cx="8498026" cy="213271"/>
           </a:xfrm>
           <a:prstGeom prst="rect">
             <a:avLst/>
@@ -3276,18 +3541,20 @@
           <a:bodyPr wrap="square" lIns="0" tIns="0" rIns="0" bIns="0" rtlCol="0" anchor="t"/>
           <a:lstStyle/>
           <a:p>
-            <a:pPr algn="l" marL="342900" indent="-342900">
-              <a:lnSpc>
-                <a:spcPts val="1620"/>
-              </a:lnSpc>
-              <a:spcAft>
-                <a:spcPts val="300"/>
-              </a:spcAft>
-              <a:buSzPct val="100000"/>
-              <a:buChar char="•"/>
-            </a:pPr>
-            <a:r>
-              <a:rPr lang="en-US" sz="1200" i="1" dirty="0">
+            <a:pPr algn="l" indent="0" marL="0">
+              <a:lnSpc>
+                <a:spcPts val="1680"/>
+              </a:lnSpc>
+              <a:spcBef>
+                <a:spcPts val="300"/>
+              </a:spcBef>
+              <a:spcAft>
+                <a:spcPts val="300"/>
+              </a:spcAft>
+              <a:buNone/>
+            </a:pPr>
+            <a:r>
+              <a:rPr lang="en-US" sz="1200" dirty="0">
                 <a:solidFill>
                   <a:srgbClr val="2C2C2C"/>
                 </a:solidFill>
@@ -3295,7 +3562,7 @@
                 <a:ea typeface="Verdana" pitchFamily="34" charset="-122"/>
                 <a:cs typeface="Verdana" pitchFamily="34" charset="-120"/>
               </a:rPr>
-              <a:t>"Sometimes one of our five friends is too much, or one is missing. When that happens, the others suffer."</a:t>
+              <a:t>Daily chant + song.</a:t>
             </a:r>
             <a:endParaRPr lang="en-US" sz="1200" dirty="0"/>
           </a:p>
@@ -3304,54 +3571,6 @@
       <p:sp>
         <p:nvSpPr>
           <p:cNvPr id="5" name="Text 3"/>
-          <p:cNvSpPr/>
-          <p:nvPr/>
-        </p:nvSpPr>
-        <p:spPr>
-          <a:xfrm>
-            <a:off x="406301" y="1460004"/>
-            <a:ext cx="8498026" cy="639812"/>
-          </a:xfrm>
-          <a:prstGeom prst="rect">
-            <a:avLst/>
-          </a:prstGeom>
-          <a:noFill/>
-          <a:ln/>
-        </p:spPr>
-        <p:txBody>
-          <a:bodyPr wrap="square" lIns="0" tIns="0" rIns="0" bIns="0" rtlCol="0" anchor="t"/>
-          <a:lstStyle/>
-          <a:p>
-            <a:pPr algn="l" indent="0" marL="0">
-              <a:lnSpc>
-                <a:spcPts val="1680"/>
-              </a:lnSpc>
-              <a:spcBef>
-                <a:spcPts val="300"/>
-              </a:spcBef>
-              <a:spcAft>
-                <a:spcPts val="300"/>
-              </a:spcAft>
-              <a:buNone/>
-            </a:pPr>
-            <a:r>
-              <a:rPr lang="en-US" sz="1200" dirty="0">
-                <a:solidFill>
-                  <a:srgbClr val="2C2C2C"/>
-                </a:solidFill>
-                <a:latin typeface="Verdana" pitchFamily="34" charset="0"/>
-                <a:ea typeface="Verdana" pitchFamily="34" charset="-122"/>
-                <a:cs typeface="Verdana" pitchFamily="34" charset="-120"/>
-              </a:rPr>
-              <a:t>– Examples (with simple drawings on the board):   – Too much Vāyu = a strong wind storm. Trees fall.   – Too little Ap = no rain. Plants die.   – Too much Pṛthvī of the wrong kind = a pile of plastic waste. Smelly.   – Too noisy Ākāśa = traffic horn outside the school. We can't sleep or study.</a:t>
-            </a:r>
-            <a:endParaRPr lang="en-US" sz="1200" dirty="0"/>
-          </a:p>
-        </p:txBody>
-      </p:sp>
-      <p:sp>
-        <p:nvSpPr>
-          <p:cNvPr id="6" name="Text 4"/>
           <p:cNvSpPr/>
           <p:nvPr/>
         </p:nvSpPr>
@@ -3501,7 +3720,7 @@
                 <a:ea typeface="Georgia" pitchFamily="34" charset="-122"/>
                 <a:cs typeface="Georgia" pitchFamily="34" charset="-120"/>
               </a:rPr>
-              <a:t>The walk (10 min)</a:t>
+              <a:t>Story — what is imbalance? (5 min)</a:t>
             </a:r>
             <a:endParaRPr lang="en-US" sz="1800" dirty="0"/>
           </a:p>
@@ -3515,8 +3734,8 @@
         </p:nvSpPr>
         <p:spPr>
           <a:xfrm>
-            <a:off x="406301" y="870942"/>
-            <a:ext cx="8498026" cy="426541"/>
+            <a:off x="634901" y="883593"/>
+            <a:ext cx="8102798" cy="1706463"/>
           </a:xfrm>
           <a:prstGeom prst="rect">
             <a:avLst/>
@@ -3528,20 +3747,18 @@
           <a:bodyPr wrap="square" lIns="0" tIns="0" rIns="0" bIns="0" rtlCol="0" anchor="t"/>
           <a:lstStyle/>
           <a:p>
-            <a:pPr algn="l" indent="0" marL="0">
-              <a:lnSpc>
-                <a:spcPts val="1680"/>
-              </a:lnSpc>
-              <a:spcBef>
-                <a:spcPts val="300"/>
-              </a:spcBef>
-              <a:spcAft>
-                <a:spcPts val="300"/>
-              </a:spcAft>
-              <a:buNone/>
-            </a:pPr>
-            <a:r>
-              <a:rPr lang="en-US" sz="1200" dirty="0">
+            <a:pPr algn="l" marL="342900" indent="-342900">
+              <a:lnSpc>
+                <a:spcPts val="1620"/>
+              </a:lnSpc>
+              <a:spcAft>
+                <a:spcPts val="300"/>
+              </a:spcAft>
+              <a:buSzPct val="100000"/>
+              <a:buChar char="•"/>
+            </a:pPr>
+            <a:r>
+              <a:rPr lang="en-US" sz="1200" i="1" dirty="0">
                 <a:solidFill>
                   <a:srgbClr val="2C2C2C"/>
                 </a:solidFill>
@@ -3549,7 +3766,127 @@
                 <a:ea typeface="Verdana" pitchFamily="34" charset="-122"/>
                 <a:cs typeface="Verdana" pitchFamily="34" charset="-120"/>
               </a:rPr>
-              <a:t>– Walk around the school grounds in a single line. Adult at the front and back. – Children carry clipboard + paper. – Look for ONE place where they think an element is too much or missing.</a:t>
+              <a:t>"Sometimes one of our five friends is too much, or one is missing. When that happens, the others suffer."</a:t>
+            </a:r>
+            <a:endParaRPr lang="en-US" sz="1200" dirty="0"/>
+          </a:p>
+          <a:p>
+            <a:pPr algn="l" marL="342900" indent="-342900">
+              <a:lnSpc>
+                <a:spcPts val="1620"/>
+              </a:lnSpc>
+              <a:spcAft>
+                <a:spcPts val="300"/>
+              </a:spcAft>
+              <a:buSzPct val="100000"/>
+              <a:buChar char="•"/>
+            </a:pPr>
+            <a:r>
+              <a:rPr lang="en-US" sz="1200" dirty="0">
+                <a:solidFill>
+                  <a:srgbClr val="2C2C2C"/>
+                </a:solidFill>
+                <a:latin typeface="Verdana" pitchFamily="34" charset="0"/>
+                <a:ea typeface="Verdana" pitchFamily="34" charset="-122"/>
+                <a:cs typeface="Verdana" pitchFamily="34" charset="-120"/>
+              </a:rPr>
+              <a:t>Examples (with simple drawings on the board):</a:t>
+            </a:r>
+            <a:endParaRPr lang="en-US" sz="1200" dirty="0"/>
+          </a:p>
+          <a:p>
+            <a:pPr algn="l" marL="342900" indent="-342900">
+              <a:lnSpc>
+                <a:spcPts val="1620"/>
+              </a:lnSpc>
+              <a:spcAft>
+                <a:spcPts val="300"/>
+              </a:spcAft>
+              <a:buSzPct val="100000"/>
+              <a:buChar char="•"/>
+            </a:pPr>
+            <a:r>
+              <a:rPr lang="en-US" sz="1200" dirty="0">
+                <a:solidFill>
+                  <a:srgbClr val="2C2C2C"/>
+                </a:solidFill>
+                <a:latin typeface="Verdana" pitchFamily="34" charset="0"/>
+                <a:ea typeface="Verdana" pitchFamily="34" charset="-122"/>
+                <a:cs typeface="Verdana" pitchFamily="34" charset="-120"/>
+              </a:rPr>
+              <a:t>Too much Vāyu = a strong wind storm. Trees fall.</a:t>
+            </a:r>
+            <a:endParaRPr lang="en-US" sz="1200" dirty="0"/>
+          </a:p>
+          <a:p>
+            <a:pPr algn="l" marL="342900" indent="-342900">
+              <a:lnSpc>
+                <a:spcPts val="1620"/>
+              </a:lnSpc>
+              <a:spcAft>
+                <a:spcPts val="300"/>
+              </a:spcAft>
+              <a:buSzPct val="100000"/>
+              <a:buChar char="•"/>
+            </a:pPr>
+            <a:r>
+              <a:rPr lang="en-US" sz="1200" dirty="0">
+                <a:solidFill>
+                  <a:srgbClr val="2C2C2C"/>
+                </a:solidFill>
+                <a:latin typeface="Verdana" pitchFamily="34" charset="0"/>
+                <a:ea typeface="Verdana" pitchFamily="34" charset="-122"/>
+                <a:cs typeface="Verdana" pitchFamily="34" charset="-120"/>
+              </a:rPr>
+              <a:t>Too little Ap = no rain. Plants die.</a:t>
+            </a:r>
+            <a:endParaRPr lang="en-US" sz="1200" dirty="0"/>
+          </a:p>
+          <a:p>
+            <a:pPr algn="l" marL="342900" indent="-342900">
+              <a:lnSpc>
+                <a:spcPts val="1620"/>
+              </a:lnSpc>
+              <a:spcAft>
+                <a:spcPts val="300"/>
+              </a:spcAft>
+              <a:buSzPct val="100000"/>
+              <a:buChar char="•"/>
+            </a:pPr>
+            <a:r>
+              <a:rPr lang="en-US" sz="1200" dirty="0">
+                <a:solidFill>
+                  <a:srgbClr val="2C2C2C"/>
+                </a:solidFill>
+                <a:latin typeface="Verdana" pitchFamily="34" charset="0"/>
+                <a:ea typeface="Verdana" pitchFamily="34" charset="-122"/>
+                <a:cs typeface="Verdana" pitchFamily="34" charset="-120"/>
+              </a:rPr>
+              <a:t>Too much Pṛthvī of the wrong kind = a pile of plastic waste. Smelly.</a:t>
+            </a:r>
+            <a:endParaRPr lang="en-US" sz="1200" dirty="0"/>
+          </a:p>
+          <a:p>
+            <a:pPr algn="l" marL="342900" indent="-342900">
+              <a:lnSpc>
+                <a:spcPts val="1620"/>
+              </a:lnSpc>
+              <a:spcAft>
+                <a:spcPts val="300"/>
+              </a:spcAft>
+              <a:buSzPct val="100000"/>
+              <a:buChar char="•"/>
+            </a:pPr>
+            <a:r>
+              <a:rPr lang="en-US" sz="1200" dirty="0">
+                <a:solidFill>
+                  <a:srgbClr val="2C2C2C"/>
+                </a:solidFill>
+                <a:latin typeface="Verdana" pitchFamily="34" charset="0"/>
+                <a:ea typeface="Verdana" pitchFamily="34" charset="-122"/>
+                <a:cs typeface="Verdana" pitchFamily="34" charset="-120"/>
+              </a:rPr>
+              <a:t>Too noisy Ākāśa = traffic horn outside the school. We can't sleep or study.</a:t>
             </a:r>
             <a:endParaRPr lang="en-US" sz="1200" dirty="0"/>
           </a:p>
@@ -3707,7 +4044,7 @@
                 <a:ea typeface="Georgia" pitchFamily="34" charset="-122"/>
                 <a:cs typeface="Georgia" pitchFamily="34" charset="-120"/>
               </a:rPr>
-              <a:t>Draw + share (12 min)</a:t>
+              <a:t>The walk (10 min)</a:t>
             </a:r>
             <a:endParaRPr lang="en-US" sz="1800" dirty="0"/>
           </a:p>
@@ -3721,8 +4058,8 @@
         </p:nvSpPr>
         <p:spPr>
           <a:xfrm>
-            <a:off x="406301" y="870942"/>
-            <a:ext cx="8498026" cy="426541"/>
+            <a:off x="634901" y="883593"/>
+            <a:ext cx="8102798" cy="769441"/>
           </a:xfrm>
           <a:prstGeom prst="rect">
             <a:avLst/>
@@ -3734,17 +4071,15 @@
           <a:bodyPr wrap="square" lIns="0" tIns="0" rIns="0" bIns="0" rtlCol="0" anchor="t"/>
           <a:lstStyle/>
           <a:p>
-            <a:pPr algn="l" indent="0" marL="0">
-              <a:lnSpc>
-                <a:spcPts val="1680"/>
-              </a:lnSpc>
-              <a:spcBef>
-                <a:spcPts val="300"/>
-              </a:spcBef>
-              <a:spcAft>
-                <a:spcPts val="300"/>
-              </a:spcAft>
-              <a:buNone/>
+            <a:pPr algn="l" marL="342900" indent="-342900">
+              <a:lnSpc>
+                <a:spcPts val="1620"/>
+              </a:lnSpc>
+              <a:spcAft>
+                <a:spcPts val="300"/>
+              </a:spcAft>
+              <a:buSzPct val="100000"/>
+              <a:buChar char="•"/>
             </a:pPr>
             <a:r>
               <a:rPr lang="en-US" sz="1200" dirty="0">
@@ -3755,22 +4090,23 @@
                 <a:ea typeface="Verdana" pitchFamily="34" charset="-122"/>
                 <a:cs typeface="Verdana" pitchFamily="34" charset="-120"/>
               </a:rPr>
-              <a:t>– Back in the classroom. – Each child draws what they saw and writes ONE sentence (teacher helps): </a:t>
-            </a:r>
-            <a:pPr algn="l" indent="0" marL="0">
-              <a:lnSpc>
-                <a:spcPts val="1680"/>
-              </a:lnSpc>
-              <a:spcBef>
-                <a:spcPts val="300"/>
-              </a:spcBef>
-              <a:spcAft>
-                <a:spcPts val="300"/>
-              </a:spcAft>
-              <a:buNone/>
-            </a:pPr>
-            <a:r>
-              <a:rPr lang="en-US" sz="1200" i="1" dirty="0">
+              <a:t>Walk around the school grounds in a single line. Adult at the front and back.</a:t>
+            </a:r>
+            <a:endParaRPr lang="en-US" sz="1200" dirty="0"/>
+          </a:p>
+          <a:p>
+            <a:pPr algn="l" marL="342900" indent="-342900">
+              <a:lnSpc>
+                <a:spcPts val="1620"/>
+              </a:lnSpc>
+              <a:spcAft>
+                <a:spcPts val="300"/>
+              </a:spcAft>
+              <a:buSzPct val="100000"/>
+              <a:buChar char="•"/>
+            </a:pPr>
+            <a:r>
+              <a:rPr lang="en-US" sz="1200" dirty="0">
                 <a:solidFill>
                   <a:srgbClr val="2C2C2C"/>
                 </a:solidFill>
@@ -3778,44 +4114,20 @@
                 <a:ea typeface="Verdana" pitchFamily="34" charset="-122"/>
                 <a:cs typeface="Verdana" pitchFamily="34" charset="-120"/>
               </a:rPr>
-              <a:t>"There is too much / too little ___________ at __________."</a:t>
+              <a:t>Children carry clipboard + paper.</a:t>
             </a:r>
             <a:endParaRPr lang="en-US" sz="1200" dirty="0"/>
           </a:p>
-        </p:txBody>
-      </p:sp>
-      <p:sp>
-        <p:nvSpPr>
-          <p:cNvPr id="5" name="Text 3"/>
-          <p:cNvSpPr/>
-          <p:nvPr/>
-        </p:nvSpPr>
-        <p:spPr>
-          <a:xfrm>
-            <a:off x="406301" y="1373684"/>
-            <a:ext cx="8498026" cy="213271"/>
-          </a:xfrm>
-          <a:prstGeom prst="rect">
-            <a:avLst/>
-          </a:prstGeom>
-          <a:noFill/>
-          <a:ln/>
-        </p:spPr>
-        <p:txBody>
-          <a:bodyPr wrap="square" lIns="0" tIns="0" rIns="0" bIns="0" rtlCol="0" anchor="t"/>
-          <a:lstStyle/>
-          <a:p>
-            <a:pPr algn="l" indent="0" marL="0">
-              <a:lnSpc>
-                <a:spcPts val="1680"/>
-              </a:lnSpc>
-              <a:spcBef>
-                <a:spcPts val="300"/>
-              </a:spcBef>
-              <a:spcAft>
-                <a:spcPts val="300"/>
-              </a:spcAft>
-              <a:buNone/>
+          <a:p>
+            <a:pPr algn="l" marL="342900" indent="-342900">
+              <a:lnSpc>
+                <a:spcPts val="1620"/>
+              </a:lnSpc>
+              <a:spcAft>
+                <a:spcPts val="300"/>
+              </a:spcAft>
+              <a:buSzPct val="100000"/>
+              <a:buChar char="•"/>
             </a:pPr>
             <a:r>
               <a:rPr lang="en-US" sz="1200" dirty="0">
@@ -3826,7 +4138,7 @@
                 <a:ea typeface="Verdana" pitchFamily="34" charset="-122"/>
                 <a:cs typeface="Verdana" pitchFamily="34" charset="-120"/>
               </a:rPr>
-              <a:t>– Quick share: 4 children show their drawings.</a:t>
+              <a:t>Look for ONE place where they think an element is too much or missing.</a:t>
             </a:r>
             <a:endParaRPr lang="en-US" sz="1200" dirty="0"/>
           </a:p>
@@ -3834,7 +4146,7 @@
       </p:sp>
       <p:sp>
         <p:nvSpPr>
-          <p:cNvPr id="6" name="Text 4"/>
+          <p:cNvPr id="5" name="Text 3"/>
           <p:cNvSpPr/>
           <p:nvPr/>
         </p:nvSpPr>
@@ -3984,7 +4296,7 @@
                 <a:ea typeface="Georgia" pitchFamily="34" charset="-122"/>
                 <a:cs typeface="Georgia" pitchFamily="34" charset="-120"/>
               </a:rPr>
-              <a:t>Show + chant (3 min)</a:t>
+              <a:t>Draw + share (12 min)</a:t>
             </a:r>
             <a:endParaRPr lang="en-US" sz="1800" dirty="0"/>
           </a:p>
@@ -3998,8 +4310,8 @@
         </p:nvSpPr>
         <p:spPr>
           <a:xfrm>
-            <a:off x="406301" y="870942"/>
-            <a:ext cx="8498026" cy="213271"/>
+            <a:off x="634901" y="883593"/>
+            <a:ext cx="8102798" cy="731341"/>
           </a:xfrm>
           <a:prstGeom prst="rect">
             <a:avLst/>
@@ -4011,17 +4323,15 @@
           <a:bodyPr wrap="square" lIns="0" tIns="0" rIns="0" bIns="0" rtlCol="0" anchor="t"/>
           <a:lstStyle/>
           <a:p>
-            <a:pPr algn="l" indent="0" marL="0">
-              <a:lnSpc>
-                <a:spcPts val="1680"/>
-              </a:lnSpc>
-              <a:spcBef>
-                <a:spcPts val="300"/>
-              </a:spcBef>
-              <a:spcAft>
-                <a:spcPts val="300"/>
-              </a:spcAft>
-              <a:buNone/>
+            <a:pPr algn="l" marL="342900" indent="-342900">
+              <a:lnSpc>
+                <a:spcPts val="1620"/>
+              </a:lnSpc>
+              <a:spcAft>
+                <a:spcPts val="300"/>
+              </a:spcAft>
+              <a:buSzPct val="100000"/>
+              <a:buChar char="•"/>
             </a:pPr>
             <a:r>
               <a:rPr lang="en-US" sz="1200" dirty="0">
@@ -4032,15 +4342,105 @@
                 <a:ea typeface="Verdana" pitchFamily="34" charset="-122"/>
                 <a:cs typeface="Verdana" pitchFamily="34" charset="-120"/>
               </a:rPr>
-              <a:t>Close with chant.</a:t>
+              <a:t>Back in the classroom.</a:t>
             </a:r>
             <a:endParaRPr lang="en-US" sz="1200" dirty="0"/>
           </a:p>
+          <a:p>
+            <a:pPr algn="l" marL="342900" indent="-342900">
+              <a:lnSpc>
+                <a:spcPts val="1620"/>
+              </a:lnSpc>
+              <a:spcAft>
+                <a:spcPts val="300"/>
+              </a:spcAft>
+              <a:buSzPct val="100000"/>
+              <a:buChar char="•"/>
+            </a:pPr>
+            <a:r>
+              <a:rPr lang="en-US" sz="1200" dirty="0">
+                <a:solidFill>
+                  <a:srgbClr val="2C2C2C"/>
+                </a:solidFill>
+                <a:latin typeface="Verdana" pitchFamily="34" charset="0"/>
+                <a:ea typeface="Verdana" pitchFamily="34" charset="-122"/>
+                <a:cs typeface="Verdana" pitchFamily="34" charset="-120"/>
+              </a:rPr>
+              <a:t>Each child draws what they saw and writes ONE sentence (teacher helps): </a:t>
+            </a:r>
+            <a:pPr algn="l" indent="0" marL="0">
+              <a:lnSpc>
+                <a:spcPts val="1620"/>
+              </a:lnSpc>
+              <a:spcAft>
+                <a:spcPts val="300"/>
+              </a:spcAft>
+              <a:buNone/>
+            </a:pPr>
+            <a:r>
+              <a:rPr lang="en-US" sz="1200" i="1" dirty="0">
+                <a:solidFill>
+                  <a:srgbClr val="2C2C2C"/>
+                </a:solidFill>
+                <a:latin typeface="Verdana" pitchFamily="34" charset="0"/>
+                <a:ea typeface="Verdana" pitchFamily="34" charset="-122"/>
+                <a:cs typeface="Verdana" pitchFamily="34" charset="-120"/>
+              </a:rPr>
+              <a:t>"There is too much / too little ___________ at __________."</a:t>
+            </a:r>
+            <a:endParaRPr lang="en-US" sz="1200" dirty="0"/>
+          </a:p>
         </p:txBody>
       </p:sp>
       <p:sp>
         <p:nvSpPr>
           <p:cNvPr id="5" name="Text 3"/>
+          <p:cNvSpPr/>
+          <p:nvPr/>
+        </p:nvSpPr>
+        <p:spPr>
+          <a:xfrm>
+            <a:off x="634901" y="1716435"/>
+            <a:ext cx="8102798" cy="281880"/>
+          </a:xfrm>
+          <a:prstGeom prst="rect">
+            <a:avLst/>
+          </a:prstGeom>
+          <a:noFill/>
+          <a:ln/>
+        </p:spPr>
+        <p:txBody>
+          <a:bodyPr wrap="square" lIns="0" tIns="0" rIns="0" bIns="0" rtlCol="0" anchor="t"/>
+          <a:lstStyle/>
+          <a:p>
+            <a:pPr algn="l" marL="342900" indent="-342900">
+              <a:lnSpc>
+                <a:spcPts val="1620"/>
+              </a:lnSpc>
+              <a:spcAft>
+                <a:spcPts val="300"/>
+              </a:spcAft>
+              <a:buSzPct val="100000"/>
+              <a:buChar char="•"/>
+            </a:pPr>
+            <a:r>
+              <a:rPr lang="en-US" sz="1200" dirty="0">
+                <a:solidFill>
+                  <a:srgbClr val="2C2C2C"/>
+                </a:solidFill>
+                <a:latin typeface="Verdana" pitchFamily="34" charset="0"/>
+                <a:ea typeface="Verdana" pitchFamily="34" charset="-122"/>
+                <a:cs typeface="Verdana" pitchFamily="34" charset="-120"/>
+              </a:rPr>
+              <a:t>Quick share: 4 children show their drawings.</a:t>
+            </a:r>
+            <a:endParaRPr lang="en-US" sz="1200" dirty="0"/>
+          </a:p>
+        </p:txBody>
+      </p:sp>
+      <p:sp>
+        <p:nvSpPr>
+          <p:cNvPr id="6" name="Text 4"/>
           <p:cNvSpPr/>
           <p:nvPr/>
         </p:nvSpPr>
@@ -4190,7 +4590,7 @@
                 <a:ea typeface="Georgia" pitchFamily="34" charset="-122"/>
                 <a:cs typeface="Georgia" pitchFamily="34" charset="-120"/>
               </a:rPr>
-              <a:t>Homework</a:t>
+              <a:t>Show + chant (3 min)</a:t>
             </a:r>
             <a:endParaRPr lang="en-US" sz="1800" dirty="0"/>
           </a:p>
@@ -4238,7 +4638,7 @@
                 <a:ea typeface="Verdana" pitchFamily="34" charset="-122"/>
                 <a:cs typeface="Verdana" pitchFamily="34" charset="-120"/>
               </a:rPr>
-              <a:t>– Tomorrow we start projects. Think: which ONE element do you want to work on?</a:t>
+              <a:t>Close with chant.</a:t>
             </a:r>
             <a:endParaRPr lang="en-US" sz="1200" dirty="0"/>
           </a:p>
